--- a/docs/slides/arhitektura.pptx
+++ b/docs/slides/arhitektura.pptx
@@ -430,7 +430,7 @@
           <a:lstStyle/>
           <a:p>
             <a:r>
-              <a:t>Технологическое ядро — генерация с опорой на найденные фрагменты документов. Модель не обучается на документах: документы разбираются на пункты и индексируются, на каждый вопрос модель получает только найденные фрагменты. Поэтому у каждого ответа есть источник, новые документы подключаются пересборкой индекса, а права доступа соблюдаются. Три уровня защиты от выдумок отмечены оранжевыми номерами. Вопросы по учёту агент переводит в SQL-запрос только на чтение. Все модели открытые и работают локально; языковая модель — отечественная GigaChat 3.1 Lightning.</a:t>
+              <a:t>Технологическое ядро — генерация с опорой на найденные фрагменты документов. Модель не обучается на документах: документы разбираются на пункты и индексируются, на каждый вопрос модель получает только найденные фрагменты. Поэтому у каждого ответа есть источник, новые документы подключаются пересборкой индекса, а права доступа соблюдаются. Четыре уровня защиты от выдумок отмечены оранжевыми номерами; четвёртый — проверка, что ответ относится к тому же предмету, а не к похожему. Вопросы по учёту агент переводит в SQL-запрос только на чтение. Все модели открытые и работают локально; языковая модель — отечественная GigaChat 3.1 Lightning.</a:t>
             </a:r>
           </a:p>
         </p:txBody>
@@ -2479,7 +2479,7 @@
       </p:sp>
       <p:sp>
         <p:nvSpPr>
-          <p:cNvPr id="64" name="Шаг: Проверка ссылок"/>
+          <p:cNvPr id="64" name="Шаг: Проверка ответа"/>
           <p:cNvSpPr/>
           <p:nvPr/>
         </p:nvSpPr>
@@ -2529,7 +2529,7 @@
                 </a:solidFill>
                 <a:latin typeface="Arial"/>
               </a:rPr>
-              <a:t>Проверка ссылок</a:t>
+              <a:t>Проверка ответа</a:t>
             </a:r>
           </a:p>
           <a:p>
@@ -2541,7 +2541,7 @@
                 </a:solidFill>
                 <a:latin typeface="Arial"/>
               </a:rPr>
-              <a:t>каждая [n] — на выданный фрагмент</a:t>
+              <a:t>ссылки верны, ответ о том же предмете</a:t>
             </a:r>
           </a:p>
         </p:txBody>
@@ -2837,7 +2837,7 @@
         </p:nvSpPr>
         <p:spPr>
           <a:xfrm>
-            <a:off x="6286500" y="3017520"/>
+            <a:off x="6286500" y="2907791"/>
             <a:ext cx="274320" cy="274320"/>
           </a:xfrm>
           <a:prstGeom prst="ellipse">
@@ -2892,7 +2892,7 @@
         </p:nvSpPr>
         <p:spPr>
           <a:xfrm>
-            <a:off x="8244840" y="3017520"/>
+            <a:off x="8244840" y="2907791"/>
             <a:ext cx="274320" cy="274320"/>
           </a:xfrm>
           <a:prstGeom prst="ellipse">
@@ -2947,7 +2947,7 @@
         </p:nvSpPr>
         <p:spPr>
           <a:xfrm>
-            <a:off x="9700260" y="3017520"/>
+            <a:off x="9407652" y="2907791"/>
             <a:ext cx="274320" cy="274320"/>
           </a:xfrm>
           <a:prstGeom prst="ellipse">
@@ -2996,7 +2996,62 @@
       </p:sp>
       <p:sp>
         <p:nvSpPr>
-          <p:cNvPr id="75" name="Индексация: PDF, DOCX"/>
+          <p:cNvPr id="75" name="Защита 4"/>
+          <p:cNvSpPr/>
+          <p:nvPr/>
+        </p:nvSpPr>
+        <p:spPr>
+          <a:xfrm>
+            <a:off x="9700260" y="2907791"/>
+            <a:ext cx="274320" cy="274320"/>
+          </a:xfrm>
+          <a:prstGeom prst="ellipse">
+            <a:avLst/>
+          </a:prstGeom>
+          <a:solidFill>
+            <a:srgbClr val="EF7D20"/>
+          </a:solidFill>
+          <a:ln w="12700">
+            <a:solidFill>
+              <a:srgbClr val="FFFFFF"/>
+            </a:solidFill>
+          </a:ln>
+          <a:effectLst/>
+        </p:spPr>
+        <p:style>
+          <a:lnRef idx="1">
+            <a:schemeClr val="accent1"/>
+          </a:lnRef>
+          <a:fillRef idx="3">
+            <a:schemeClr val="accent1"/>
+          </a:fillRef>
+          <a:effectRef idx="2">
+            <a:schemeClr val="accent1"/>
+          </a:effectRef>
+          <a:fontRef idx="minor">
+            <a:schemeClr val="lt1"/>
+          </a:fontRef>
+        </p:style>
+        <p:txBody>
+          <a:bodyPr rtlCol="0" anchor="ctr" lIns="0" rIns="0" tIns="0" bIns="0"/>
+          <a:lstStyle/>
+          <a:p>
+            <a:pPr algn="ctr"/>
+            <a:r>
+              <a:rPr sz="1100" b="1">
+                <a:solidFill>
+                  <a:srgbClr val="FFFFFF"/>
+                </a:solidFill>
+                <a:latin typeface="Arial"/>
+              </a:rPr>
+              <a:t>4</a:t>
+            </a:r>
+          </a:p>
+        </p:txBody>
+      </p:sp>
+      <p:sp>
+        <p:nvSpPr>
+          <p:cNvPr id="76" name="Индексация: PDF, DOCX"/>
           <p:cNvSpPr/>
           <p:nvPr/>
         </p:nvSpPr>
@@ -3063,7 +3118,7 @@
       </p:sp>
       <p:sp>
         <p:nvSpPr>
-          <p:cNvPr id="76" name="Индексация: Разбор на пункты"/>
+          <p:cNvPr id="77" name="Индексация: Разбор на пункты"/>
           <p:cNvSpPr/>
           <p:nvPr/>
         </p:nvSpPr>
@@ -3130,7 +3185,7 @@
       </p:sp>
       <p:sp>
         <p:nvSpPr>
-          <p:cNvPr id="77" name="Индексация: Индекс"/>
+          <p:cNvPr id="78" name="Индексация: Индекс"/>
           <p:cNvSpPr/>
           <p:nvPr/>
         </p:nvSpPr>
@@ -3197,49 +3252,13 @@
       </p:sp>
       <p:cxnSp>
         <p:nvCxnSpPr>
-          <p:cNvPr id="78" name="Connector 77"/>
-          <p:cNvCxnSpPr/>
-          <p:nvPr/>
-        </p:nvCxnSpPr>
-        <p:spPr>
-          <a:xfrm>
-            <a:off x="1554480" y="2386584"/>
-            <a:ext cx="164592" cy="0"/>
-          </a:xfrm>
-          <a:prstGeom prst="line">
-            <a:avLst/>
-          </a:prstGeom>
-          <a:ln w="19050">
-            <a:solidFill>
-              <a:srgbClr val="8064A2"/>
-            </a:solidFill>
-            <a:tailEnd type="triangle" w="med" len="med"/>
-          </a:ln>
-        </p:spPr>
-        <p:style>
-          <a:lnRef idx="2">
-            <a:schemeClr val="accent1"/>
-          </a:lnRef>
-          <a:fillRef idx="0">
-            <a:schemeClr val="accent1"/>
-          </a:fillRef>
-          <a:effectRef idx="1">
-            <a:schemeClr val="accent1"/>
-          </a:effectRef>
-          <a:fontRef idx="minor">
-            <a:schemeClr val="tx1"/>
-          </a:fontRef>
-        </p:style>
-      </p:cxnSp>
-      <p:cxnSp>
-        <p:nvCxnSpPr>
           <p:cNvPr id="79" name="Connector 78"/>
           <p:cNvCxnSpPr/>
           <p:nvPr/>
         </p:nvCxnSpPr>
         <p:spPr>
           <a:xfrm>
-            <a:off x="3112008" y="2386584"/>
+            <a:off x="1554480" y="2386584"/>
             <a:ext cx="164592" cy="0"/>
           </a:xfrm>
           <a:prstGeom prst="line">
@@ -3275,8 +3294,8 @@
         </p:nvCxnSpPr>
         <p:spPr>
           <a:xfrm>
-            <a:off x="4076700" y="2743200"/>
-            <a:ext cx="0" cy="384048"/>
+            <a:off x="3112008" y="2386584"/>
+            <a:ext cx="164592" cy="0"/>
           </a:xfrm>
           <a:prstGeom prst="line">
             <a:avLst/>
@@ -3303,9 +3322,45 @@
           </a:fontRef>
         </p:style>
       </p:cxnSp>
-      <p:sp>
-        <p:nvSpPr>
-          <p:cNvPr id="81" name="TextBox 80"/>
+      <p:cxnSp>
+        <p:nvCxnSpPr>
+          <p:cNvPr id="81" name="Connector 80"/>
+          <p:cNvCxnSpPr/>
+          <p:nvPr/>
+        </p:nvCxnSpPr>
+        <p:spPr>
+          <a:xfrm>
+            <a:off x="4076700" y="2743200"/>
+            <a:ext cx="0" cy="384048"/>
+          </a:xfrm>
+          <a:prstGeom prst="line">
+            <a:avLst/>
+          </a:prstGeom>
+          <a:ln w="19050">
+            <a:solidFill>
+              <a:srgbClr val="8064A2"/>
+            </a:solidFill>
+            <a:tailEnd type="triangle" w="med" len="med"/>
+          </a:ln>
+        </p:spPr>
+        <p:style>
+          <a:lnRef idx="2">
+            <a:schemeClr val="accent1"/>
+          </a:lnRef>
+          <a:fillRef idx="0">
+            <a:schemeClr val="accent1"/>
+          </a:fillRef>
+          <a:effectRef idx="1">
+            <a:schemeClr val="accent1"/>
+          </a:effectRef>
+          <a:fontRef idx="minor">
+            <a:schemeClr val="tx1"/>
+          </a:fontRef>
+        </p:style>
+      </p:cxnSp>
+      <p:sp>
+        <p:nvSpPr>
+          <p:cNvPr id="82" name="TextBox 81"/>
           <p:cNvSpPr txBox="1"/>
           <p:nvPr/>
         </p:nvSpPr>
@@ -3340,7 +3395,7 @@
       </p:sp>
       <p:sp>
         <p:nvSpPr>
-          <p:cNvPr id="82" name="Три уровня защиты"/>
+          <p:cNvPr id="83" name="Четыре уровня защиты"/>
           <p:cNvSpPr/>
           <p:nvPr/>
         </p:nvSpPr>
@@ -3390,7 +3445,7 @@
                 </a:solidFill>
                 <a:latin typeface="Arial"/>
               </a:rPr>
-              <a:t>Три уровня защиты от выдумок</a:t>
+              <a:t>Четыре уровня защиты от выдумок</a:t>
             </a:r>
           </a:p>
           <a:p>
@@ -3401,7 +3456,7 @@
                 </a:solidFill>
                 <a:latin typeface="Arial"/>
               </a:rPr>
-              <a:t>1 — найденное нерелевантно: «ответа нет», модель не вызывается</a:t>
+              <a:t>1 — нерелевантно: «ответа нет», модель не вызывается   2 — модель видит только найденное</a:t>
             </a:r>
           </a:p>
           <a:p>
@@ -3412,14 +3467,14 @@
                 </a:solidFill>
                 <a:latin typeface="Arial"/>
               </a:rPr>
-              <a:t>2 — модель видит только найденные фрагменты   3 — ответ без верной ссылки не показывается</a:t>
-            </a:r>
-          </a:p>
-        </p:txBody>
-      </p:sp>
-      <p:sp>
-        <p:nvSpPr>
-          <p:cNvPr id="83" name="TextBox 82"/>
+              <a:t>3 — ответ без верной ссылки не показывается   4 — ответ о том же предмете, а не о похожем</a:t>
+            </a:r>
+          </a:p>
+        </p:txBody>
+      </p:sp>
+      <p:sp>
+        <p:nvSpPr>
+          <p:cNvPr id="84" name="TextBox 83"/>
           <p:cNvSpPr txBox="1"/>
           <p:nvPr/>
         </p:nvSpPr>
@@ -3454,7 +3509,7 @@
       </p:sp>
       <p:sp>
         <p:nvSpPr>
-          <p:cNvPr id="84" name="Учёт: GigaChat → SQL"/>
+          <p:cNvPr id="85" name="Учёт: GigaChat → SQL"/>
           <p:cNvSpPr/>
           <p:nvPr/>
         </p:nvSpPr>
@@ -3523,7 +3578,7 @@
       </p:sp>
       <p:sp>
         <p:nvSpPr>
-          <p:cNvPr id="85" name="Учёт: Учётная база"/>
+          <p:cNvPr id="86" name="Учёт: Учётная база"/>
           <p:cNvSpPr/>
           <p:nvPr/>
         </p:nvSpPr>
@@ -3588,7 +3643,7 @@
       </p:sp>
       <p:sp>
         <p:nvSpPr>
-          <p:cNvPr id="86" name="Учёт: Ответ + запрос + таблица"/>
+          <p:cNvPr id="87" name="Учёт: Ответ + запрос + таблица"/>
           <p:cNvSpPr/>
           <p:nvPr/>
         </p:nvSpPr>
@@ -3655,50 +3710,14 @@
       </p:sp>
       <p:cxnSp>
         <p:nvCxnSpPr>
-          <p:cNvPr id="87" name="Connector 86"/>
-          <p:cNvCxnSpPr/>
-          <p:nvPr/>
-        </p:nvCxnSpPr>
-        <p:spPr>
-          <a:xfrm>
-            <a:off x="2415540" y="4041648"/>
-            <a:ext cx="0" cy="420624"/>
-          </a:xfrm>
-          <a:prstGeom prst="line">
-            <a:avLst/>
-          </a:prstGeom>
-          <a:ln w="19050">
-            <a:solidFill>
-              <a:srgbClr val="8064A2"/>
-            </a:solidFill>
-            <a:tailEnd type="triangle" w="med" len="med"/>
-          </a:ln>
-        </p:spPr>
-        <p:style>
-          <a:lnRef idx="2">
-            <a:schemeClr val="accent1"/>
-          </a:lnRef>
-          <a:fillRef idx="0">
-            <a:schemeClr val="accent1"/>
-          </a:fillRef>
-          <a:effectRef idx="1">
-            <a:schemeClr val="accent1"/>
-          </a:effectRef>
-          <a:fontRef idx="minor">
-            <a:schemeClr val="tx1"/>
-          </a:fontRef>
-        </p:style>
-      </p:cxnSp>
-      <p:cxnSp>
-        <p:nvCxnSpPr>
           <p:cNvPr id="88" name="Connector 87"/>
           <p:cNvCxnSpPr/>
           <p:nvPr/>
         </p:nvCxnSpPr>
         <p:spPr>
           <a:xfrm>
-            <a:off x="3512820" y="4828032"/>
-            <a:ext cx="182880" cy="0"/>
+            <a:off x="2415540" y="4041648"/>
+            <a:ext cx="0" cy="420624"/>
           </a:xfrm>
           <a:prstGeom prst="line">
             <a:avLst/>
@@ -3733,146 +3752,8 @@
         </p:nvCxnSpPr>
         <p:spPr>
           <a:xfrm>
-            <a:off x="5250180" y="4828032"/>
+            <a:off x="3512820" y="4828032"/>
             <a:ext cx="182880" cy="0"/>
-          </a:xfrm>
-          <a:prstGeom prst="line">
-            <a:avLst/>
-          </a:prstGeom>
-          <a:ln w="19050">
-            <a:solidFill>
-              <a:srgbClr val="8064A2"/>
-            </a:solidFill>
-            <a:tailEnd type="triangle" w="med" len="med"/>
-          </a:ln>
-        </p:spPr>
-        <p:style>
-          <a:lnRef idx="2">
-            <a:schemeClr val="accent1"/>
-          </a:lnRef>
-          <a:fillRef idx="0">
-            <a:schemeClr val="accent1"/>
-          </a:fillRef>
-          <a:effectRef idx="1">
-            <a:schemeClr val="accent1"/>
-          </a:effectRef>
-          <a:fontRef idx="minor">
-            <a:schemeClr val="tx1"/>
-          </a:fontRef>
-        </p:style>
-      </p:cxnSp>
-      <p:sp>
-        <p:nvSpPr>
-          <p:cNvPr id="90" name="TextBox 89"/>
-          <p:cNvSpPr txBox="1"/>
-          <p:nvPr/>
-        </p:nvSpPr>
-        <p:spPr>
-          <a:xfrm>
-            <a:off x="2525268" y="4069080"/>
-            <a:ext cx="1463040" cy="201168"/>
-          </a:xfrm>
-          <a:prstGeom prst="rect">
-            <a:avLst/>
-          </a:prstGeom>
-          <a:noFill/>
-        </p:spPr>
-        <p:txBody>
-          <a:bodyPr wrap="square" lIns="0" rIns="0" tIns="0" bIns="0" anchor="t">
-            <a:spAutoFit/>
-          </a:bodyPr>
-          <a:lstStyle/>
-          <a:p>
-            <a:pPr algn="l"/>
-            <a:r>
-              <a:rPr sz="1000" b="0">
-                <a:solidFill>
-                  <a:srgbClr val="6E667A"/>
-                </a:solidFill>
-                <a:latin typeface="Arial"/>
-              </a:rPr>
-              <a:t>вопрос по учёту</a:t>
-            </a:r>
-          </a:p>
-        </p:txBody>
-      </p:sp>
-      <p:sp>
-        <p:nvSpPr>
-          <p:cNvPr id="91" name="Журнал"/>
-          <p:cNvSpPr/>
-          <p:nvPr/>
-        </p:nvSpPr>
-        <p:spPr>
-          <a:xfrm>
-            <a:off x="10012680" y="4462272"/>
-            <a:ext cx="1691640" cy="731520"/>
-          </a:xfrm>
-          <a:prstGeom prst="roundRect">
-            <a:avLst>
-              <a:gd name="adj" fmla="val 18000"/>
-            </a:avLst>
-          </a:prstGeom>
-          <a:solidFill>
-            <a:srgbClr val="EDEAF0"/>
-          </a:solidFill>
-          <a:ln>
-            <a:noFill/>
-          </a:ln>
-          <a:effectLst/>
-        </p:spPr>
-        <p:style>
-          <a:lnRef idx="1">
-            <a:schemeClr val="accent1"/>
-          </a:lnRef>
-          <a:fillRef idx="3">
-            <a:schemeClr val="accent1"/>
-          </a:fillRef>
-          <a:effectRef idx="2">
-            <a:schemeClr val="accent1"/>
-          </a:effectRef>
-          <a:fontRef idx="minor">
-            <a:schemeClr val="lt1"/>
-          </a:fontRef>
-        </p:style>
-        <p:txBody>
-          <a:bodyPr rtlCol="0" anchor="ctr" wrap="square" lIns="54864" rIns="54864" tIns="27432" bIns="27432"/>
-          <a:lstStyle/>
-          <a:p>
-            <a:pPr algn="ctr"/>
-            <a:r>
-              <a:rPr sz="1200" b="1">
-                <a:solidFill>
-                  <a:srgbClr val="1F1A2E"/>
-                </a:solidFill>
-                <a:latin typeface="Arial"/>
-              </a:rPr>
-              <a:t>Журнал запросов</a:t>
-            </a:r>
-          </a:p>
-          <a:p>
-            <a:pPr algn="ctr"/>
-            <a:r>
-              <a:rPr sz="1050">
-                <a:solidFill>
-                  <a:srgbClr val="1F1A2E"/>
-                </a:solidFill>
-                <a:latin typeface="Arial"/>
-              </a:rPr>
-              <a:t>кто, что спросил, что получил</a:t>
-            </a:r>
-          </a:p>
-        </p:txBody>
-      </p:sp>
-      <p:cxnSp>
-        <p:nvCxnSpPr>
-          <p:cNvPr id="92" name="Connector 91"/>
-          <p:cNvCxnSpPr/>
-          <p:nvPr/>
-        </p:nvCxnSpPr>
-        <p:spPr>
-          <a:xfrm>
-            <a:off x="10858500" y="4041648"/>
-            <a:ext cx="0" cy="420624"/>
           </a:xfrm>
           <a:prstGeom prst="line">
             <a:avLst/>
@@ -3901,14 +3782,14 @@
       </p:cxnSp>
       <p:cxnSp>
         <p:nvCxnSpPr>
-          <p:cNvPr id="93" name="Connector 92"/>
+          <p:cNvPr id="90" name="Connector 89"/>
           <p:cNvCxnSpPr/>
           <p:nvPr/>
         </p:nvCxnSpPr>
         <p:spPr>
           <a:xfrm>
-            <a:off x="7536180" y="4828032"/>
-            <a:ext cx="2476500" cy="0"/>
+            <a:off x="5250180" y="4828032"/>
+            <a:ext cx="182880" cy="0"/>
           </a:xfrm>
           <a:prstGeom prst="line">
             <a:avLst/>
@@ -3937,7 +3818,181 @@
       </p:cxnSp>
       <p:sp>
         <p:nvSpPr>
-          <p:cNvPr id="94" name="Факт: Отечественная модель"/>
+          <p:cNvPr id="91" name="TextBox 90"/>
+          <p:cNvSpPr txBox="1"/>
+          <p:nvPr/>
+        </p:nvSpPr>
+        <p:spPr>
+          <a:xfrm>
+            <a:off x="2525268" y="4069080"/>
+            <a:ext cx="1463040" cy="201168"/>
+          </a:xfrm>
+          <a:prstGeom prst="rect">
+            <a:avLst/>
+          </a:prstGeom>
+          <a:noFill/>
+        </p:spPr>
+        <p:txBody>
+          <a:bodyPr wrap="square" lIns="0" rIns="0" tIns="0" bIns="0" anchor="t">
+            <a:spAutoFit/>
+          </a:bodyPr>
+          <a:lstStyle/>
+          <a:p>
+            <a:pPr algn="l"/>
+            <a:r>
+              <a:rPr sz="1000" b="0">
+                <a:solidFill>
+                  <a:srgbClr val="6E667A"/>
+                </a:solidFill>
+                <a:latin typeface="Arial"/>
+              </a:rPr>
+              <a:t>вопрос по учёту</a:t>
+            </a:r>
+          </a:p>
+        </p:txBody>
+      </p:sp>
+      <p:sp>
+        <p:nvSpPr>
+          <p:cNvPr id="92" name="Журнал"/>
+          <p:cNvSpPr/>
+          <p:nvPr/>
+        </p:nvSpPr>
+        <p:spPr>
+          <a:xfrm>
+            <a:off x="10012680" y="4462272"/>
+            <a:ext cx="1691640" cy="731520"/>
+          </a:xfrm>
+          <a:prstGeom prst="roundRect">
+            <a:avLst>
+              <a:gd name="adj" fmla="val 18000"/>
+            </a:avLst>
+          </a:prstGeom>
+          <a:solidFill>
+            <a:srgbClr val="EDEAF0"/>
+          </a:solidFill>
+          <a:ln>
+            <a:noFill/>
+          </a:ln>
+          <a:effectLst/>
+        </p:spPr>
+        <p:style>
+          <a:lnRef idx="1">
+            <a:schemeClr val="accent1"/>
+          </a:lnRef>
+          <a:fillRef idx="3">
+            <a:schemeClr val="accent1"/>
+          </a:fillRef>
+          <a:effectRef idx="2">
+            <a:schemeClr val="accent1"/>
+          </a:effectRef>
+          <a:fontRef idx="minor">
+            <a:schemeClr val="lt1"/>
+          </a:fontRef>
+        </p:style>
+        <p:txBody>
+          <a:bodyPr rtlCol="0" anchor="ctr" wrap="square" lIns="54864" rIns="54864" tIns="27432" bIns="27432"/>
+          <a:lstStyle/>
+          <a:p>
+            <a:pPr algn="ctr"/>
+            <a:r>
+              <a:rPr sz="1200" b="1">
+                <a:solidFill>
+                  <a:srgbClr val="1F1A2E"/>
+                </a:solidFill>
+                <a:latin typeface="Arial"/>
+              </a:rPr>
+              <a:t>Журнал запросов</a:t>
+            </a:r>
+          </a:p>
+          <a:p>
+            <a:pPr algn="ctr"/>
+            <a:r>
+              <a:rPr sz="1050">
+                <a:solidFill>
+                  <a:srgbClr val="1F1A2E"/>
+                </a:solidFill>
+                <a:latin typeface="Arial"/>
+              </a:rPr>
+              <a:t>кто, что спросил, что получил</a:t>
+            </a:r>
+          </a:p>
+        </p:txBody>
+      </p:sp>
+      <p:cxnSp>
+        <p:nvCxnSpPr>
+          <p:cNvPr id="93" name="Connector 92"/>
+          <p:cNvCxnSpPr/>
+          <p:nvPr/>
+        </p:nvCxnSpPr>
+        <p:spPr>
+          <a:xfrm>
+            <a:off x="10858500" y="4041648"/>
+            <a:ext cx="0" cy="420624"/>
+          </a:xfrm>
+          <a:prstGeom prst="line">
+            <a:avLst/>
+          </a:prstGeom>
+          <a:ln w="19050">
+            <a:solidFill>
+              <a:srgbClr val="8064A2"/>
+            </a:solidFill>
+            <a:tailEnd type="triangle" w="med" len="med"/>
+          </a:ln>
+        </p:spPr>
+        <p:style>
+          <a:lnRef idx="2">
+            <a:schemeClr val="accent1"/>
+          </a:lnRef>
+          <a:fillRef idx="0">
+            <a:schemeClr val="accent1"/>
+          </a:fillRef>
+          <a:effectRef idx="1">
+            <a:schemeClr val="accent1"/>
+          </a:effectRef>
+          <a:fontRef idx="minor">
+            <a:schemeClr val="tx1"/>
+          </a:fontRef>
+        </p:style>
+      </p:cxnSp>
+      <p:cxnSp>
+        <p:nvCxnSpPr>
+          <p:cNvPr id="94" name="Connector 93"/>
+          <p:cNvCxnSpPr/>
+          <p:nvPr/>
+        </p:nvCxnSpPr>
+        <p:spPr>
+          <a:xfrm>
+            <a:off x="7536180" y="4828032"/>
+            <a:ext cx="2476500" cy="0"/>
+          </a:xfrm>
+          <a:prstGeom prst="line">
+            <a:avLst/>
+          </a:prstGeom>
+          <a:ln w="19050">
+            <a:solidFill>
+              <a:srgbClr val="8064A2"/>
+            </a:solidFill>
+            <a:tailEnd type="triangle" w="med" len="med"/>
+          </a:ln>
+        </p:spPr>
+        <p:style>
+          <a:lnRef idx="2">
+            <a:schemeClr val="accent1"/>
+          </a:lnRef>
+          <a:fillRef idx="0">
+            <a:schemeClr val="accent1"/>
+          </a:fillRef>
+          <a:effectRef idx="1">
+            <a:schemeClr val="accent1"/>
+          </a:effectRef>
+          <a:fontRef idx="minor">
+            <a:schemeClr val="tx1"/>
+          </a:fontRef>
+        </p:style>
+      </p:cxnSp>
+      <p:sp>
+        <p:nvSpPr>
+          <p:cNvPr id="95" name="Факт: Отечественная модель"/>
           <p:cNvSpPr/>
           <p:nvPr/>
         </p:nvSpPr>
@@ -4004,7 +4059,7 @@
       </p:sp>
       <p:sp>
         <p:nvSpPr>
-          <p:cNvPr id="95" name="Факт: Без интернета"/>
+          <p:cNvPr id="96" name="Факт: Без интернета"/>
           <p:cNvSpPr/>
           <p:nvPr/>
         </p:nvSpPr>
@@ -4071,7 +4126,7 @@
       </p:sp>
       <p:sp>
         <p:nvSpPr>
-          <p:cNvPr id="96" name="Факт: Скорость"/>
+          <p:cNvPr id="97" name="Факт: Скорость"/>
           <p:cNvSpPr/>
           <p:nvPr/>
         </p:nvSpPr>
@@ -4138,7 +4193,7 @@
       </p:sp>
       <p:sp>
         <p:nvSpPr>
-          <p:cNvPr id="97" name="Факт: Указ № 529"/>
+          <p:cNvPr id="98" name="Факт: Указ № 529"/>
           <p:cNvSpPr/>
           <p:nvPr/>
         </p:nvSpPr>

--- a/docs/slides/arhitektura.pptx
+++ b/docs/slides/arhitektura.pptx
@@ -430,7 +430,7 @@
           <a:lstStyle/>
           <a:p>
             <a:r>
-              <a:t>Технологическое ядро — генерация с опорой на найденные фрагменты документов. Модель не обучается на документах: документы разбираются на пункты и индексируются, на каждый вопрос модель получает только найденные фрагменты. Поэтому у каждого ответа есть источник, новые документы подключаются пересборкой индекса, а права доступа соблюдаются. Четыре уровня защиты от выдумок отмечены оранжевыми номерами; четвёртый — проверка, что ответ относится к тому же предмету, а не к похожему. Вопросы по учёту агент переводит в SQL-запрос только на чтение. Все модели открытые и работают локально; языковая модель — отечественная GigaChat 3.1 Lightning.</a:t>
+              <a:t>Технологическое ядро — генерация с опорой на найденные фрагменты документов. Модель не обучается на документах: документы разбираются на пункты и индексируются, на каждый вопрос модель получает только найденные фрагменты. Поэтому у каждого ответа есть источник, новые документы подключаются за секунды, а права доступа соблюдаются. Четыре уровня защиты от выдумок отмечены оранжевыми номерами; четвёртый — проверка, что ответ относится к тому же предмету, а не к похожему. Вопросы по учёту агент переводит в SQL-запрос только на чтение.</a:t>
             </a:r>
           </a:p>
         </p:txBody>
@@ -1893,7 +1893,7 @@
 </p:sldMaster>
 </file>
 
-<file path=ppt/slides/slide1.xml><?xml version="1.0" encoding="utf-8"?>
+<file path=ppt/slides/slide4.xml><?xml version="1.0" encoding="utf-8"?>
 <p:sld xmlns:a="http://schemas.openxmlformats.org/drawingml/2006/main" xmlns:r="http://schemas.openxmlformats.org/officeDocument/2006/relationships" xmlns:p="http://schemas.openxmlformats.org/presentationml/2006/main">
   <p:cSld>
     <p:spTree>
@@ -2121,7 +2121,12 @@
           </a:bodyPr>
           <a:lstStyle/>
           <a:p>
-            <a:pPr algn="l"/>
+            <a:pPr algn="l">
+              <a:spcAft>
+                <a:spcPts val="400"/>
+              </a:spcAft>
+              <a:buNone/>
+            </a:pPr>
             <a:r>
               <a:rPr sz="1500" b="0">
                 <a:solidFill>
@@ -3051,7 +3056,47 @@
       </p:sp>
       <p:sp>
         <p:nvSpPr>
-          <p:cNvPr id="76" name="Индексация: PDF, DOCX"/>
+          <p:cNvPr id="76" name="TextBox 75"/>
+          <p:cNvSpPr txBox="1"/>
+          <p:nvPr/>
+        </p:nvSpPr>
+        <p:spPr>
+          <a:xfrm>
+            <a:off x="457200" y="2880360"/>
+            <a:ext cx="3657600" cy="201168"/>
+          </a:xfrm>
+          <a:prstGeom prst="rect">
+            <a:avLst/>
+          </a:prstGeom>
+          <a:noFill/>
+        </p:spPr>
+        <p:txBody>
+          <a:bodyPr wrap="square" lIns="0" rIns="0" tIns="0" bIns="0" anchor="t">
+            <a:spAutoFit/>
+          </a:bodyPr>
+          <a:lstStyle/>
+          <a:p>
+            <a:pPr algn="l">
+              <a:spcAft>
+                <a:spcPts val="400"/>
+              </a:spcAft>
+              <a:buNone/>
+            </a:pPr>
+            <a:r>
+              <a:rPr sz="1000" b="1">
+                <a:solidFill>
+                  <a:srgbClr val="6E667A"/>
+                </a:solidFill>
+                <a:latin typeface="Arial"/>
+              </a:rPr>
+              <a:t>ВОПРОС ПО ДОКУМЕНТАМ</a:t>
+            </a:r>
+          </a:p>
+        </p:txBody>
+      </p:sp>
+      <p:sp>
+        <p:nvSpPr>
+          <p:cNvPr id="77" name="Индексация: PDF, DOCX"/>
           <p:cNvSpPr/>
           <p:nvPr/>
         </p:nvSpPr>
@@ -3118,7 +3163,7 @@
       </p:sp>
       <p:sp>
         <p:nvSpPr>
-          <p:cNvPr id="77" name="Индексация: Разбор на пункты"/>
+          <p:cNvPr id="78" name="Индексация: Разбор на пункты"/>
           <p:cNvSpPr/>
           <p:nvPr/>
         </p:nvSpPr>
@@ -3185,7 +3230,7 @@
       </p:sp>
       <p:sp>
         <p:nvSpPr>
-          <p:cNvPr id="78" name="Индексация: Индекс"/>
+          <p:cNvPr id="79" name="Индексация: Индекс"/>
           <p:cNvSpPr/>
           <p:nvPr/>
         </p:nvSpPr>
@@ -3252,49 +3297,13 @@
       </p:sp>
       <p:cxnSp>
         <p:nvCxnSpPr>
-          <p:cNvPr id="79" name="Connector 78"/>
-          <p:cNvCxnSpPr/>
-          <p:nvPr/>
-        </p:nvCxnSpPr>
-        <p:spPr>
-          <a:xfrm>
-            <a:off x="1554480" y="2386584"/>
-            <a:ext cx="164592" cy="0"/>
-          </a:xfrm>
-          <a:prstGeom prst="line">
-            <a:avLst/>
-          </a:prstGeom>
-          <a:ln w="19050">
-            <a:solidFill>
-              <a:srgbClr val="8064A2"/>
-            </a:solidFill>
-            <a:tailEnd type="triangle" w="med" len="med"/>
-          </a:ln>
-        </p:spPr>
-        <p:style>
-          <a:lnRef idx="2">
-            <a:schemeClr val="accent1"/>
-          </a:lnRef>
-          <a:fillRef idx="0">
-            <a:schemeClr val="accent1"/>
-          </a:fillRef>
-          <a:effectRef idx="1">
-            <a:schemeClr val="accent1"/>
-          </a:effectRef>
-          <a:fontRef idx="minor">
-            <a:schemeClr val="tx1"/>
-          </a:fontRef>
-        </p:style>
-      </p:cxnSp>
-      <p:cxnSp>
-        <p:nvCxnSpPr>
           <p:cNvPr id="80" name="Connector 79"/>
           <p:cNvCxnSpPr/>
           <p:nvPr/>
         </p:nvCxnSpPr>
         <p:spPr>
           <a:xfrm>
-            <a:off x="3112008" y="2386584"/>
+            <a:off x="1554480" y="2386584"/>
             <a:ext cx="164592" cy="0"/>
           </a:xfrm>
           <a:prstGeom prst="line">
@@ -3330,8 +3339,8 @@
         </p:nvCxnSpPr>
         <p:spPr>
           <a:xfrm>
-            <a:off x="4076700" y="2743200"/>
-            <a:ext cx="0" cy="384048"/>
+            <a:off x="3112008" y="2386584"/>
+            <a:ext cx="164592" cy="0"/>
           </a:xfrm>
           <a:prstGeom prst="line">
             <a:avLst/>
@@ -3358,9 +3367,45 @@
           </a:fontRef>
         </p:style>
       </p:cxnSp>
-      <p:sp>
-        <p:nvSpPr>
-          <p:cNvPr id="82" name="TextBox 81"/>
+      <p:cxnSp>
+        <p:nvCxnSpPr>
+          <p:cNvPr id="82" name="Connector 81"/>
+          <p:cNvCxnSpPr/>
+          <p:nvPr/>
+        </p:nvCxnSpPr>
+        <p:spPr>
+          <a:xfrm>
+            <a:off x="4076700" y="2743200"/>
+            <a:ext cx="0" cy="384048"/>
+          </a:xfrm>
+          <a:prstGeom prst="line">
+            <a:avLst/>
+          </a:prstGeom>
+          <a:ln w="19050">
+            <a:solidFill>
+              <a:srgbClr val="8064A2"/>
+            </a:solidFill>
+            <a:tailEnd type="triangle" w="med" len="med"/>
+          </a:ln>
+        </p:spPr>
+        <p:style>
+          <a:lnRef idx="2">
+            <a:schemeClr val="accent1"/>
+          </a:lnRef>
+          <a:fillRef idx="0">
+            <a:schemeClr val="accent1"/>
+          </a:fillRef>
+          <a:effectRef idx="1">
+            <a:schemeClr val="accent1"/>
+          </a:effectRef>
+          <a:fontRef idx="minor">
+            <a:schemeClr val="tx1"/>
+          </a:fontRef>
+        </p:style>
+      </p:cxnSp>
+      <p:sp>
+        <p:nvSpPr>
+          <p:cNvPr id="83" name="TextBox 82"/>
           <p:cNvSpPr txBox="1"/>
           <p:nvPr/>
         </p:nvSpPr>
@@ -3380,7 +3425,12 @@
           </a:bodyPr>
           <a:lstStyle/>
           <a:p>
-            <a:pPr algn="l"/>
+            <a:pPr algn="l">
+              <a:spcAft>
+                <a:spcPts val="400"/>
+              </a:spcAft>
+              <a:buNone/>
+            </a:pPr>
             <a:r>
               <a:rPr sz="1000" b="1">
                 <a:solidFill>
@@ -3395,7 +3445,7 @@
       </p:sp>
       <p:sp>
         <p:nvSpPr>
-          <p:cNvPr id="83" name="Четыре уровня защиты"/>
+          <p:cNvPr id="84" name="Четыре уровня защиты"/>
           <p:cNvSpPr/>
           <p:nvPr/>
         </p:nvSpPr>
@@ -3474,42 +3524,7 @@
       </p:sp>
       <p:sp>
         <p:nvSpPr>
-          <p:cNvPr id="84" name="TextBox 83"/>
-          <p:cNvSpPr txBox="1"/>
-          <p:nvPr/>
-        </p:nvSpPr>
-        <p:spPr>
-          <a:xfrm>
-            <a:off x="457200" y="2880360"/>
-            <a:ext cx="3657600" cy="201168"/>
-          </a:xfrm>
-          <a:prstGeom prst="rect">
-            <a:avLst/>
-          </a:prstGeom>
-          <a:noFill/>
-        </p:spPr>
-        <p:txBody>
-          <a:bodyPr wrap="square" lIns="0" rIns="0" tIns="0" bIns="0" anchor="t">
-            <a:spAutoFit/>
-          </a:bodyPr>
-          <a:lstStyle/>
-          <a:p>
-            <a:pPr algn="l"/>
-            <a:r>
-              <a:rPr sz="1000" b="1">
-                <a:solidFill>
-                  <a:srgbClr val="6E667A"/>
-                </a:solidFill>
-                <a:latin typeface="Arial"/>
-              </a:rPr>
-              <a:t>ВОПРОС ПО ДОКУМЕНТАМ</a:t>
-            </a:r>
-          </a:p>
-        </p:txBody>
-      </p:sp>
-      <p:sp>
-        <p:nvSpPr>
-          <p:cNvPr id="85" name="Учёт: GigaChat → SQL"/>
+          <p:cNvPr id="85" name="Учёт: SQL"/>
           <p:cNvSpPr/>
           <p:nvPr/>
         </p:nvSpPr>
@@ -3578,7 +3593,7 @@
       </p:sp>
       <p:sp>
         <p:nvSpPr>
-          <p:cNvPr id="86" name="Учёт: Учётная база"/>
+          <p:cNvPr id="86" name="Учёт: база"/>
           <p:cNvSpPr/>
           <p:nvPr/>
         </p:nvSpPr>
@@ -3643,7 +3658,7 @@
       </p:sp>
       <p:sp>
         <p:nvSpPr>
-          <p:cNvPr id="87" name="Учёт: Ответ + запрос + таблица"/>
+          <p:cNvPr id="87" name="Учёт: ответ"/>
           <p:cNvSpPr/>
           <p:nvPr/>
         </p:nvSpPr>
@@ -3838,7 +3853,12 @@
           </a:bodyPr>
           <a:lstStyle/>
           <a:p>
-            <a:pPr algn="l"/>
+            <a:pPr algn="l">
+              <a:spcAft>
+                <a:spcPts val="400"/>
+              </a:spcAft>
+              <a:buNone/>
+            </a:pPr>
             <a:r>
               <a:rPr sz="1000" b="0">
                 <a:solidFill>

--- a/docs/slides/arhitektura.pptx
+++ b/docs/slides/arhitektura.pptx
@@ -4206,7 +4206,7 @@
                 </a:solidFill>
                 <a:latin typeface="Arial"/>
               </a:rPr>
-              <a:t>0,9 с на ответ (RTX 5070), около 7 с без видеокарты</a:t>
+              <a:t>1,3 с на ответ (RTX 5070), около 7 с без видеокарты</a:t>
             </a:r>
           </a:p>
         </p:txBody>

--- a/docs/slides/arhitektura.pptx
+++ b/docs/slides/arhitektura.pptx
@@ -430,7 +430,7 @@
           <a:lstStyle/>
           <a:p>
             <a:r>
-              <a:t>Технологическое ядро — генерация с опорой на найденные фрагменты документов. Модель не обучается на документах: документы разбираются на пункты и индексируются, на каждый вопрос модель получает только найденные фрагменты. Поэтому у каждого ответа есть источник, новые документы подключаются за секунды, а права доступа соблюдаются. Четыре уровня защиты от выдумок отмечены оранжевыми номерами; четвёртый — проверка, что ответ относится к тому же предмету, а не к похожему. Вопросы по учёту агент переводит в SQL-запрос только на чтение.</a:t>
+              <a:t>Технологическое ядро — генерация с опорой на найденные фрагменты документов. Модель не обучается на документах: документы разбираются на пункты и индексируются, на каждый вопрос модель получает только найденные фрагменты. Поэтому у каждого ответа есть источник, новые документы подключаются за минуту, а права доступа соблюдаются. Четыре уровня защиты от выдумок отмечены оранжевыми номерами; четвёртый — проверка, что ответ относится к тому же предмету, а не к похожему. Вопросы по учёту агент переводит в SQL-запрос только на чтение.</a:t>
             </a:r>
           </a:p>
         </p:txBody>
@@ -3706,7 +3706,7 @@
                 </a:solidFill>
                 <a:latin typeface="Arial"/>
               </a:rPr>
-              <a:t>Ответ + запрос + таблица</a:t>
+              <a:t>Ответ + таблица записей</a:t>
             </a:r>
           </a:p>
           <a:p>
@@ -3718,7 +3718,7 @@
                 </a:solidFill>
                 <a:latin typeface="Arial"/>
               </a:rPr>
-              <a:t>запрос виден пользователю</a:t>
+              <a:t>запрос — у администратора</a:t>
             </a:r>
           </a:p>
         </p:txBody>
@@ -4206,7 +4206,7 @@
                 </a:solidFill>
                 <a:latin typeface="Arial"/>
               </a:rPr>
-              <a:t>1,3 с на ответ (RTX 5070), около 7 с без видеокарты</a:t>
+              <a:t>1,2 с на ответ (RTX 5070), около 4 с без видеокарты</a:t>
             </a:r>
           </a:p>
         </p:txBody>

--- a/docs/slides/arhitektura.pptx
+++ b/docs/slides/arhitektura.pptx
@@ -4206,7 +4206,7 @@
                 </a:solidFill>
                 <a:latin typeface="Arial"/>
               </a:rPr>
-              <a:t>1,2 с на ответ (RTX 5070), около 4 с без видеокарты</a:t>
+              <a:t>1,2 с на ответ (RTX 5070), около 4,5 с без видеокарты</a:t>
             </a:r>
           </a:p>
         </p:txBody>

--- a/docs/slides/arhitektura.pptx
+++ b/docs/slides/arhitektura.pptx
@@ -4206,7 +4206,7 @@
                 </a:solidFill>
                 <a:latin typeface="Arial"/>
               </a:rPr>
-              <a:t>1,2 с на ответ (RTX 5070), около 4,5 с без видеокарты</a:t>
+              <a:t>1,2 с на ответ (RTX 5070), около 4,3 с без видеокарты</a:t>
             </a:r>
           </a:p>
         </p:txBody>

--- a/docs/slides/arhitektura.pptx
+++ b/docs/slides/arhitektura.pptx
@@ -4206,7 +4206,7 @@
                 </a:solidFill>
                 <a:latin typeface="Arial"/>
               </a:rPr>
-              <a:t>1,2 с на ответ (RTX 5070), около 4,3 с без видеокарты</a:t>
+              <a:t>1,2 с на ответ (RTX 5070), около 4,4 с без видеокарты</a:t>
             </a:r>
           </a:p>
         </p:txBody>

--- a/docs/slides/arhitektura.pptx
+++ b/docs/slides/arhitektura.pptx
@@ -4139,7 +4139,7 @@
                 </a:solidFill>
                 <a:latin typeface="Arial"/>
               </a:rPr>
-              <a:t>одна видеокарта 12 ГБ или только процессор</a:t>
+              <a:t>одна видеокарта: 12 ГБ на ПК или 4 ГБ на ноутбуке</a:t>
             </a:r>
           </a:p>
         </p:txBody>
@@ -4206,7 +4206,7 @@
                 </a:solidFill>
                 <a:latin typeface="Arial"/>
               </a:rPr>
-              <a:t>1,2 с на ответ (RTX 5070), около 4,4 с без видеокарты</a:t>
+              <a:t>1,2 с на ответ (RTX 5070), 8,4 с на ноутбуке (RTX 3050 4 ГБ)</a:t>
             </a:r>
           </a:p>
         </p:txBody>

--- a/docs/slides/arhitektura.pptx
+++ b/docs/slides/arhitektura.pptx
@@ -430,7 +430,7 @@
           <a:lstStyle/>
           <a:p>
             <a:r>
-              <a:t>Технологическое ядро — генерация с опорой на найденные фрагменты документов. Модель не обучается на документах: документы разбираются на пункты и индексируются, на каждый вопрос модель получает только найденные фрагменты. Поэтому у каждого ответа есть источник, новые документы подключаются за минуту, а права доступа соблюдаются. Четыре уровня защиты от выдумок отмечены оранжевыми номерами; четвёртый — проверка, что ответ относится к тому же предмету, а не к похожему. Вопросы по учёту агент переводит в SQL-запрос только на чтение.</a:t>
+              <a:t>Технологическое ядро — генерация с опорой на найденные фрагменты документов. Модель не обучается на документах: документы разбираются на пункты и индексируются, на каждый вопрос модель получает только найденные фрагменты. Поэтому у каждого ответа есть источник, новые документы подключаются за минуту, а права доступа соблюдаются. Четыре уровня защиты от выдумок отмечены оранжевыми номерами; четвёртый — проверка, что ответ относится к тому же предмету, а не к похожему. Вопросы по учёту агент переводит в SQL-запрос только на чтение. Вопросы о параметрах продукции (подбор по требованиям клиента, сравнение моделей, расчёты) решает программа по справочнику: точное значение, единица и источник; языковая модель чисел не считает.</a:t>
             </a:r>
           </a:p>
         </p:txBody>
@@ -2134,7 +2134,7 @@
                 </a:solidFill>
                 <a:latin typeface="Arial"/>
               </a:rPr>
-              <a:t>Отвечает только по документам и учётной базе предприятия — со ссылкой на источник и без интернета</a:t>
+              <a:t>Только по документам, справочнику параметров и учёту — со ссылкой на источник, без интернета</a:t>
             </a:r>
           </a:p>
         </p:txBody>
@@ -2272,7 +2272,7 @@
                 </a:solidFill>
                 <a:latin typeface="Arial"/>
               </a:rPr>
-              <a:t>GigaChat выбирает: документы или база</a:t>
+              <a:t>документы, справочник или учёт</a:t>
             </a:r>
           </a:p>
         </p:txBody>
@@ -3096,7 +3096,7 @@
       </p:sp>
       <p:sp>
         <p:nvSpPr>
-          <p:cNvPr id="77" name="Индексация: PDF, DOCX"/>
+          <p:cNvPr id="77" name="Индексация: Документы"/>
           <p:cNvSpPr/>
           <p:nvPr/>
         </p:nvSpPr>
@@ -3144,7 +3144,7 @@
                 </a:solidFill>
                 <a:latin typeface="Arial"/>
               </a:rPr>
-              <a:t>PDF, DOCX</a:t>
+              <a:t>Документы</a:t>
             </a:r>
           </a:p>
           <a:p>
@@ -3156,7 +3156,7 @@
                 </a:solidFill>
                 <a:latin typeface="Arial"/>
               </a:rPr>
-              <a:t>регламенты, ГОСТы</a:t>
+              <a:t>PDF, Word, Excel, сканы</a:t>
             </a:r>
           </a:p>
         </p:txBody>
@@ -3531,7 +3531,7 @@
         <p:spPr>
           <a:xfrm>
             <a:off x="1684020" y="4462272"/>
-            <a:ext cx="1828800" cy="731520"/>
+            <a:ext cx="1645920" cy="731520"/>
           </a:xfrm>
           <a:prstGeom prst="roundRect">
             <a:avLst>
@@ -3599,8 +3599,8 @@
         </p:nvSpPr>
         <p:spPr>
           <a:xfrm>
-            <a:off x="3695700" y="4462272"/>
-            <a:ext cx="1554480" cy="731520"/>
+            <a:off x="3512820" y="4462272"/>
+            <a:ext cx="1325880" cy="731520"/>
           </a:xfrm>
           <a:prstGeom prst="can">
             <a:avLst/>
@@ -3664,8 +3664,8 @@
         </p:nvSpPr>
         <p:spPr>
           <a:xfrm>
-            <a:off x="5433060" y="4462272"/>
-            <a:ext cx="2103120" cy="731520"/>
+            <a:off x="5021580" y="4462272"/>
+            <a:ext cx="1874519" cy="731520"/>
           </a:xfrm>
           <a:prstGeom prst="roundRect">
             <a:avLst>
@@ -3706,7 +3706,7 @@
                 </a:solidFill>
                 <a:latin typeface="Arial"/>
               </a:rPr>
-              <a:t>Ответ + таблица записей</a:t>
+              <a:t>Ответ + таблица</a:t>
             </a:r>
           </a:p>
           <a:p>
@@ -3767,7 +3767,7 @@
         </p:nvCxnSpPr>
         <p:spPr>
           <a:xfrm>
-            <a:off x="3512820" y="4828032"/>
+            <a:off x="3329940" y="4828032"/>
             <a:ext cx="182880" cy="0"/>
           </a:xfrm>
           <a:prstGeom prst="line">
@@ -3803,7 +3803,7 @@
         </p:nvCxnSpPr>
         <p:spPr>
           <a:xfrm>
-            <a:off x="5250180" y="4828032"/>
+            <a:off x="4838700" y="4828032"/>
             <a:ext cx="182880" cy="0"/>
           </a:xfrm>
           <a:prstGeom prst="line">
@@ -3839,8 +3839,8 @@
         </p:nvSpPr>
         <p:spPr>
           <a:xfrm>
-            <a:off x="2525268" y="4069080"/>
-            <a:ext cx="1463040" cy="201168"/>
+            <a:off x="1665732" y="4069080"/>
+            <a:ext cx="640080" cy="201168"/>
           </a:xfrm>
           <a:prstGeom prst="rect">
             <a:avLst/>
@@ -3866,7 +3866,7 @@
                 </a:solidFill>
                 <a:latin typeface="Arial"/>
               </a:rPr>
-              <a:t>вопрос по учёту</a:t>
+              <a:t>по учёту</a:t>
             </a:r>
           </a:p>
         </p:txBody>
@@ -3957,6 +3957,110 @@
               <a:srgbClr val="8064A2"/>
             </a:solidFill>
             <a:tailEnd type="triangle" w="med" len="med"/>
+          </a:ln>
+        </p:spPr>
+        <p:style>
+          <a:lnRef idx="2">
+            <a:schemeClr val="accent1"/>
+          </a:lnRef>
+          <a:fillRef idx="0">
+            <a:schemeClr val="accent1"/>
+          </a:fillRef>
+          <a:effectRef idx="1">
+            <a:schemeClr val="accent1"/>
+          </a:effectRef>
+          <a:fontRef idx="minor">
+            <a:schemeClr val="tx1"/>
+          </a:fontRef>
+        </p:style>
+      </p:cxnSp>
+      <p:sp>
+        <p:nvSpPr>
+          <p:cNvPr id="94" name="Справочник"/>
+          <p:cNvSpPr/>
+          <p:nvPr/>
+        </p:nvSpPr>
+        <p:spPr>
+          <a:xfrm>
+            <a:off x="7124700" y="4462272"/>
+            <a:ext cx="2659380" cy="731520"/>
+          </a:xfrm>
+          <a:prstGeom prst="roundRect">
+            <a:avLst>
+              <a:gd name="adj" fmla="val 18000"/>
+            </a:avLst>
+          </a:prstGeom>
+          <a:solidFill>
+            <a:srgbClr val="FFFFFF"/>
+          </a:solidFill>
+          <a:ln w="15875">
+            <a:solidFill>
+              <a:srgbClr val="EF7D20"/>
+            </a:solidFill>
+          </a:ln>
+          <a:effectLst/>
+        </p:spPr>
+        <p:style>
+          <a:lnRef idx="1">
+            <a:schemeClr val="accent1"/>
+          </a:lnRef>
+          <a:fillRef idx="3">
+            <a:schemeClr val="accent1"/>
+          </a:fillRef>
+          <a:effectRef idx="2">
+            <a:schemeClr val="accent1"/>
+          </a:effectRef>
+          <a:fontRef idx="minor">
+            <a:schemeClr val="lt1"/>
+          </a:fontRef>
+        </p:style>
+        <p:txBody>
+          <a:bodyPr rtlCol="0" anchor="ctr" wrap="square" lIns="54864" rIns="54864" tIns="27432" bIns="27432"/>
+          <a:lstStyle/>
+          <a:p>
+            <a:pPr algn="ctr"/>
+            <a:r>
+              <a:rPr sz="1200" b="1">
+                <a:solidFill>
+                  <a:srgbClr val="1F1A2E"/>
+                </a:solidFill>
+                <a:latin typeface="Arial"/>
+              </a:rPr>
+              <a:t>Справочник параметров</a:t>
+            </a:r>
+          </a:p>
+          <a:p>
+            <a:pPr algn="ctr"/>
+            <a:r>
+              <a:rPr sz="1050">
+                <a:solidFill>
+                  <a:srgbClr val="1F1A2E"/>
+                </a:solidFill>
+                <a:latin typeface="Arial"/>
+              </a:rPr>
+              <a:t>значение · единица · источник; подбор и расчёт — программой, без модели</a:t>
+            </a:r>
+          </a:p>
+        </p:txBody>
+      </p:sp>
+      <p:cxnSp>
+        <p:nvCxnSpPr>
+          <p:cNvPr id="95" name="Connector 94"/>
+          <p:cNvCxnSpPr/>
+          <p:nvPr/>
+        </p:nvCxnSpPr>
+        <p:spPr>
+          <a:xfrm>
+            <a:off x="2918460" y="4041648"/>
+            <a:ext cx="0" cy="301752"/>
+          </a:xfrm>
+          <a:prstGeom prst="line">
+            <a:avLst/>
+          </a:prstGeom>
+          <a:ln w="19050">
+            <a:solidFill>
+              <a:srgbClr val="8064A2"/>
+            </a:solidFill>
           </a:ln>
         </p:spPr>
         <p:style>
@@ -3976,14 +4080,49 @@
       </p:cxnSp>
       <p:cxnSp>
         <p:nvCxnSpPr>
-          <p:cNvPr id="94" name="Connector 93"/>
+          <p:cNvPr id="96" name="Connector 95"/>
           <p:cNvCxnSpPr/>
           <p:nvPr/>
         </p:nvCxnSpPr>
         <p:spPr>
           <a:xfrm>
-            <a:off x="7536180" y="4828032"/>
-            <a:ext cx="2476500" cy="0"/>
+            <a:off x="2918460" y="4343400"/>
+            <a:ext cx="5535930" cy="0"/>
+          </a:xfrm>
+          <a:prstGeom prst="line">
+            <a:avLst/>
+          </a:prstGeom>
+          <a:ln w="19050">
+            <a:solidFill>
+              <a:srgbClr val="8064A2"/>
+            </a:solidFill>
+          </a:ln>
+        </p:spPr>
+        <p:style>
+          <a:lnRef idx="2">
+            <a:schemeClr val="accent1"/>
+          </a:lnRef>
+          <a:fillRef idx="0">
+            <a:schemeClr val="accent1"/>
+          </a:fillRef>
+          <a:effectRef idx="1">
+            <a:schemeClr val="accent1"/>
+          </a:effectRef>
+          <a:fontRef idx="minor">
+            <a:schemeClr val="tx1"/>
+          </a:fontRef>
+        </p:style>
+      </p:cxnSp>
+      <p:cxnSp>
+        <p:nvCxnSpPr>
+          <p:cNvPr id="97" name="Connector 96"/>
+          <p:cNvCxnSpPr/>
+          <p:nvPr/>
+        </p:nvCxnSpPr>
+        <p:spPr>
+          <a:xfrm>
+            <a:off x="8454390" y="4343400"/>
+            <a:ext cx="0" cy="118872"/>
           </a:xfrm>
           <a:prstGeom prst="line">
             <a:avLst/>
@@ -4012,7 +4151,83 @@
       </p:cxnSp>
       <p:sp>
         <p:nvSpPr>
-          <p:cNvPr id="95" name="Факт: Отечественная модель"/>
+          <p:cNvPr id="98" name="TextBox 97"/>
+          <p:cNvSpPr txBox="1"/>
+          <p:nvPr/>
+        </p:nvSpPr>
+        <p:spPr>
+          <a:xfrm>
+            <a:off x="7170420" y="4114800"/>
+            <a:ext cx="2659380" cy="201168"/>
+          </a:xfrm>
+          <a:prstGeom prst="rect">
+            <a:avLst/>
+          </a:prstGeom>
+          <a:noFill/>
+        </p:spPr>
+        <p:txBody>
+          <a:bodyPr wrap="square" lIns="0" rIns="0" tIns="0" bIns="0" anchor="t">
+            <a:spAutoFit/>
+          </a:bodyPr>
+          <a:lstStyle/>
+          <a:p>
+            <a:pPr algn="l">
+              <a:spcAft>
+                <a:spcPts val="400"/>
+              </a:spcAft>
+              <a:buNone/>
+            </a:pPr>
+            <a:r>
+              <a:rPr sz="1000" b="0">
+                <a:solidFill>
+                  <a:srgbClr val="6E667A"/>
+                </a:solidFill>
+                <a:latin typeface="Arial"/>
+              </a:rPr>
+              <a:t>вопрос о параметрах продукции</a:t>
+            </a:r>
+          </a:p>
+        </p:txBody>
+      </p:sp>
+      <p:cxnSp>
+        <p:nvCxnSpPr>
+          <p:cNvPr id="99" name="Connector 98"/>
+          <p:cNvCxnSpPr/>
+          <p:nvPr/>
+        </p:nvCxnSpPr>
+        <p:spPr>
+          <a:xfrm>
+            <a:off x="9784080" y="4828032"/>
+            <a:ext cx="228600" cy="0"/>
+          </a:xfrm>
+          <a:prstGeom prst="line">
+            <a:avLst/>
+          </a:prstGeom>
+          <a:ln w="19050">
+            <a:solidFill>
+              <a:srgbClr val="8064A2"/>
+            </a:solidFill>
+            <a:tailEnd type="triangle" w="med" len="med"/>
+          </a:ln>
+        </p:spPr>
+        <p:style>
+          <a:lnRef idx="2">
+            <a:schemeClr val="accent1"/>
+          </a:lnRef>
+          <a:fillRef idx="0">
+            <a:schemeClr val="accent1"/>
+          </a:fillRef>
+          <a:effectRef idx="1">
+            <a:schemeClr val="accent1"/>
+          </a:effectRef>
+          <a:fontRef idx="minor">
+            <a:schemeClr val="tx1"/>
+          </a:fontRef>
+        </p:style>
+      </p:cxnSp>
+      <p:sp>
+        <p:nvSpPr>
+          <p:cNvPr id="100" name="Факт: Отечественная модель"/>
           <p:cNvSpPr/>
           <p:nvPr/>
         </p:nvSpPr>
@@ -4079,7 +4294,7 @@
       </p:sp>
       <p:sp>
         <p:nvSpPr>
-          <p:cNvPr id="96" name="Факт: Без интернета"/>
+          <p:cNvPr id="101" name="Факт: Без интернета"/>
           <p:cNvSpPr/>
           <p:nvPr/>
         </p:nvSpPr>
@@ -4146,7 +4361,7 @@
       </p:sp>
       <p:sp>
         <p:nvSpPr>
-          <p:cNvPr id="97" name="Факт: Скорость"/>
+          <p:cNvPr id="102" name="Факт: Скорость"/>
           <p:cNvSpPr/>
           <p:nvPr/>
         </p:nvSpPr>
@@ -4213,7 +4428,7 @@
       </p:sp>
       <p:sp>
         <p:nvSpPr>
-          <p:cNvPr id="98" name="Факт: Указ № 529"/>
+          <p:cNvPr id="103" name="Факт: Указ № 529"/>
           <p:cNvSpPr/>
           <p:nvPr/>
         </p:nvSpPr>

--- a/docs/slides/arhitektura.pptx
+++ b/docs/slides/arhitektura.pptx
@@ -4038,7 +4038,7 @@
                 </a:solidFill>
                 <a:latin typeface="Arial"/>
               </a:rPr>
-              <a:t>значение · единица · источник; подбор и расчёт — программой, без модели</a:t>
+              <a:t>значение · единица · источник; подбор, ТКП, расчёт — без модели</a:t>
             </a:r>
           </a:p>
         </p:txBody>
@@ -4184,7 +4184,7 @@
                 </a:solidFill>
                 <a:latin typeface="Arial"/>
               </a:rPr>
-              <a:t>вопрос о параметрах продукции</a:t>
+              <a:t>вопрос о продукции или письмо клиента</a:t>
             </a:r>
           </a:p>
         </p:txBody>
